--- a/sem_6_mem/presentations/caos_6.pptx
+++ b/sem_6_mem/presentations/caos_6.pptx
@@ -25,14 +25,15 @@
     <p:sldId id="277" r:id="rId19"/>
     <p:sldId id="270" r:id="rId20"/>
     <p:sldId id="280" r:id="rId21"/>
-    <p:sldId id="271" r:id="rId22"/>
-    <p:sldId id="281" r:id="rId23"/>
-    <p:sldId id="282" r:id="rId24"/>
-    <p:sldId id="272" r:id="rId25"/>
-    <p:sldId id="273" r:id="rId26"/>
-    <p:sldId id="274" r:id="rId27"/>
-    <p:sldId id="278" r:id="rId28"/>
-    <p:sldId id="279" r:id="rId29"/>
+    <p:sldId id="284" r:id="rId22"/>
+    <p:sldId id="271" r:id="rId23"/>
+    <p:sldId id="281" r:id="rId24"/>
+    <p:sldId id="282" r:id="rId25"/>
+    <p:sldId id="272" r:id="rId26"/>
+    <p:sldId id="273" r:id="rId27"/>
+    <p:sldId id="274" r:id="rId28"/>
+    <p:sldId id="278" r:id="rId29"/>
+    <p:sldId id="279" r:id="rId30"/>
   </p:sldIdLst>
   <p:sldSz cx="20104100" cy="11309350"/>
   <p:notesSz cx="20104100" cy="11309350"/>
@@ -293,7 +294,7 @@
           <a:p>
             <a:fld id="{1D8BD707-D9CF-40AE-B4C6-C98DA3205C09}" type="datetimeFigureOut">
               <a:rPr lang="en-US"/>
-              <a:t>11/1/2024</a:t>
+              <a:t>10/23/2025</a:t>
             </a:fld>
             <a:endParaRPr lang="en-US"/>
           </a:p>
@@ -468,7 +469,7 @@
           <a:p>
             <a:fld id="{1D8BD707-D9CF-40AE-B4C6-C98DA3205C09}" type="datetimeFigureOut">
               <a:rPr lang="en-US"/>
-              <a:t>11/1/2024</a:t>
+              <a:t>10/23/2025</a:t>
             </a:fld>
             <a:endParaRPr lang="en-US"/>
           </a:p>
@@ -688,7 +689,7 @@
           <a:p>
             <a:fld id="{1D8BD707-D9CF-40AE-B4C6-C98DA3205C09}" type="datetimeFigureOut">
               <a:rPr lang="en-US"/>
-              <a:t>11/1/2024</a:t>
+              <a:t>10/23/2025</a:t>
             </a:fld>
             <a:endParaRPr lang="en-US"/>
           </a:p>
@@ -836,7 +837,7 @@
           <a:p>
             <a:fld id="{1D8BD707-D9CF-40AE-B4C6-C98DA3205C09}" type="datetimeFigureOut">
               <a:rPr lang="en-US"/>
-              <a:t>11/1/2024</a:t>
+              <a:t>10/23/2025</a:t>
             </a:fld>
             <a:endParaRPr lang="en-US"/>
           </a:p>
@@ -955,7 +956,7 @@
           <a:p>
             <a:fld id="{1D8BD707-D9CF-40AE-B4C6-C98DA3205C09}" type="datetimeFigureOut">
               <a:rPr lang="en-US"/>
-              <a:t>11/1/2024</a:t>
+              <a:t>10/23/2025</a:t>
             </a:fld>
             <a:endParaRPr lang="en-US"/>
           </a:p>
@@ -1178,7 +1179,7 @@
           <a:p>
             <a:fld id="{1D8BD707-D9CF-40AE-B4C6-C98DA3205C09}" type="datetimeFigureOut">
               <a:rPr lang="en-US"/>
-              <a:t>11/1/2024</a:t>
+              <a:t>10/23/2025</a:t>
             </a:fld>
             <a:endParaRPr lang="en-US"/>
           </a:p>
@@ -6452,11 +6453,25 @@
               <a:t> </a:t>
             </a:r>
             <a:r>
-              <a:rPr sz="3200" spc="10" dirty="0">
-                <a:latin typeface="Arial" panose="020B0604020202020204" pitchFamily="34" charset="0"/>
-                <a:cs typeface="Arial" panose="020B0604020202020204" pitchFamily="34" charset="0"/>
-              </a:rPr>
-              <a:t>обнволять</a:t>
+              <a:rPr sz="3200" spc="10" dirty="0" err="1">
+                <a:latin typeface="Arial" panose="020B0604020202020204" pitchFamily="34" charset="0"/>
+                <a:cs typeface="Arial" panose="020B0604020202020204" pitchFamily="34" charset="0"/>
+              </a:rPr>
+              <a:t>об</a:t>
+            </a:r>
+            <a:r>
+              <a:rPr lang="ru-RU" sz="3200" spc="10" dirty="0">
+                <a:latin typeface="Arial" panose="020B0604020202020204" pitchFamily="34" charset="0"/>
+                <a:cs typeface="Arial" panose="020B0604020202020204" pitchFamily="34" charset="0"/>
+              </a:rPr>
+              <a:t>нов</a:t>
+            </a:r>
+            <a:r>
+              <a:rPr sz="3200" spc="10" dirty="0" err="1">
+                <a:latin typeface="Arial" panose="020B0604020202020204" pitchFamily="34" charset="0"/>
+                <a:cs typeface="Arial" panose="020B0604020202020204" pitchFamily="34" charset="0"/>
+              </a:rPr>
+              <a:t>лять</a:t>
             </a:r>
             <a:r>
               <a:rPr sz="3200" spc="5" dirty="0">
@@ -6827,7 +6842,14 @@
                 <a:latin typeface="Arial" panose="020B0604020202020204" pitchFamily="34" charset="0"/>
                 <a:cs typeface="Arial" panose="020B0604020202020204" pitchFamily="34" charset="0"/>
               </a:rPr>
-              <a:t>относительно которого</a:t>
+              <a:t>относительно </a:t>
+            </a:r>
+            <a:r>
+              <a:rPr sz="3200" spc="10" dirty="0" err="1">
+                <a:latin typeface="Arial" panose="020B0604020202020204" pitchFamily="34" charset="0"/>
+                <a:cs typeface="Arial" panose="020B0604020202020204" pitchFamily="34" charset="0"/>
+              </a:rPr>
+              <a:t>которого</a:t>
             </a:r>
             <a:r>
               <a:rPr sz="3200" spc="15" dirty="0">
@@ -6837,11 +6859,25 @@
               <a:t> </a:t>
             </a:r>
             <a:r>
-              <a:rPr sz="3200" spc="10" dirty="0">
+              <a:rPr sz="3200" spc="10" dirty="0" err="1">
                 <a:latin typeface="Arial" panose="020B0604020202020204" pitchFamily="34" charset="0"/>
                 <a:cs typeface="Arial" panose="020B0604020202020204" pitchFamily="34" charset="0"/>
               </a:rPr>
               <a:t>отображаем</a:t>
+            </a:r>
+            <a:r>
+              <a:rPr lang="en-US" sz="3200" spc="10" dirty="0">
+                <a:latin typeface="Arial" panose="020B0604020202020204" pitchFamily="34" charset="0"/>
+                <a:cs typeface="Arial" panose="020B0604020202020204" pitchFamily="34" charset="0"/>
+              </a:rPr>
+              <a:t>. </a:t>
+            </a:r>
+            <a:r>
+              <a:rPr lang="ru-RU" sz="3200" spc="10" dirty="0">
+                <a:latin typeface="Arial" panose="020B0604020202020204" pitchFamily="34" charset="0"/>
+                <a:cs typeface="Arial" panose="020B0604020202020204" pitchFamily="34" charset="0"/>
+              </a:rPr>
+              <a:t>Кратно размеру страниц</a:t>
             </a:r>
             <a:endParaRPr sz="3200" dirty="0">
               <a:latin typeface="Arial" panose="020B0604020202020204" pitchFamily="34" charset="0"/>
@@ -6927,7 +6963,7 @@
         <p:spPr>
           <a:xfrm>
             <a:off x="1076272" y="3281022"/>
-            <a:ext cx="17951555" cy="2031325"/>
+            <a:ext cx="17951555" cy="2708434"/>
           </a:xfrm>
         </p:spPr>
         <p:txBody>
@@ -7048,7 +7084,21 @@
                 <a:latin typeface="Arial" panose="020B0604020202020204" pitchFamily="34" charset="0"/>
                 <a:cs typeface="Arial" panose="020B0604020202020204" pitchFamily="34" charset="0"/>
               </a:rPr>
-              <a:t>)</a:t>
+              <a:t>), </a:t>
+            </a:r>
+            <a:r>
+              <a:rPr lang="ru-RU" sz="4400" dirty="0">
+                <a:latin typeface="Arial" panose="020B0604020202020204" pitchFamily="34" charset="0"/>
+                <a:cs typeface="Arial" panose="020B0604020202020204" pitchFamily="34" charset="0"/>
+              </a:rPr>
+              <a:t>имеет смысл только для </a:t>
+            </a:r>
+            <a:r>
+              <a:rPr lang="en-US" sz="4400" dirty="0">
+                <a:latin typeface="Arial" panose="020B0604020202020204" pitchFamily="34" charset="0"/>
+                <a:cs typeface="Arial" panose="020B0604020202020204" pitchFamily="34" charset="0"/>
+              </a:rPr>
+              <a:t>MAP_SHARED</a:t>
             </a:r>
           </a:p>
         </p:txBody>
@@ -7507,7 +7557,7 @@
               </a:rPr>
               <a:t>mallopt)</a:t>
             </a:r>
-            <a:endParaRPr sz="3950">
+            <a:endParaRPr sz="3950" dirty="0">
               <a:latin typeface="Microsoft Sans Serif"/>
               <a:cs typeface="Microsoft Sans Serif"/>
             </a:endParaRPr>
@@ -7624,7 +7674,7 @@
               </a:rPr>
               <a:t>страницы</a:t>
             </a:r>
-            <a:endParaRPr sz="3950">
+            <a:endParaRPr sz="3950" dirty="0">
               <a:latin typeface="Lucida Sans Unicode"/>
               <a:cs typeface="Lucida Sans Unicode"/>
             </a:endParaRPr>
@@ -8007,10 +8057,66 @@
               </a:rPr>
               <a:t>успех</a:t>
             </a:r>
-            <a:endParaRPr sz="3950">
+            <a:endParaRPr sz="3950" dirty="0">
               <a:latin typeface="Lucida Sans Unicode"/>
               <a:cs typeface="Lucida Sans Unicode"/>
             </a:endParaRPr>
+          </a:p>
+        </p:txBody>
+      </p:sp>
+      <p:sp>
+        <p:nvSpPr>
+          <p:cNvPr id="4" name="TextBox 3">
+            <a:extLst>
+              <a:ext uri="{FF2B5EF4-FFF2-40B4-BE49-F238E27FC236}">
+                <a16:creationId xmlns:a16="http://schemas.microsoft.com/office/drawing/2014/main" id="{5231C373-B995-4921-B798-384E36045CFE}"/>
+              </a:ext>
+            </a:extLst>
+          </p:cNvPr>
+          <p:cNvSpPr txBox="1"/>
+          <p:nvPr/>
+        </p:nvSpPr>
+        <p:spPr>
+          <a:xfrm>
+            <a:off x="13115573" y="10338505"/>
+            <a:ext cx="7022282" cy="707886"/>
+          </a:xfrm>
+          <a:prstGeom prst="rect">
+            <a:avLst/>
+          </a:prstGeom>
+          <a:noFill/>
+        </p:spPr>
+        <p:txBody>
+          <a:bodyPr wrap="square" rtlCol="0">
+            <a:spAutoFit/>
+          </a:bodyPr>
+          <a:lstStyle/>
+          <a:p>
+            <a:r>
+              <a:rPr lang="ru-RU" sz="4000" dirty="0">
+                <a:hlinkClick r:id="rId2"/>
+              </a:rPr>
+              <a:t>Как устроен </a:t>
+            </a:r>
+            <a:r>
+              <a:rPr lang="en-US" sz="4000" dirty="0">
+                <a:hlinkClick r:id="rId2"/>
+              </a:rPr>
+              <a:t>malloc (</a:t>
+            </a:r>
+            <a:r>
+              <a:rPr lang="ru-RU" sz="4000" dirty="0">
+                <a:hlinkClick r:id="rId2"/>
+              </a:rPr>
+              <a:t>и </a:t>
+            </a:r>
+            <a:r>
+              <a:rPr lang="en-US" sz="4000" dirty="0">
+                <a:hlinkClick r:id="rId2"/>
+              </a:rPr>
+              <a:t>exploits)</a:t>
+            </a:r>
+            <a:endParaRPr lang="ru-RU" sz="4000" dirty="0"/>
           </a:p>
         </p:txBody>
       </p:sp>
@@ -9733,6 +9839,100 @@
 </file>
 
 <file path=ppt/slides/slide21.xml><?xml version="1.0" encoding="utf-8"?>
+<p:sld xmlns:a="http://schemas.openxmlformats.org/drawingml/2006/main" xmlns:r="http://schemas.openxmlformats.org/officeDocument/2006/relationships" xmlns:p="http://schemas.openxmlformats.org/presentationml/2006/main">
+  <p:cSld>
+    <p:spTree>
+      <p:nvGrpSpPr>
+        <p:cNvPr id="1" name=""/>
+        <p:cNvGrpSpPr/>
+        <p:nvPr/>
+      </p:nvGrpSpPr>
+      <p:grpSpPr>
+        <a:xfrm>
+          <a:off x="0" y="0"/>
+          <a:ext cx="0" cy="0"/>
+          <a:chOff x="0" y="0"/>
+          <a:chExt cx="0" cy="0"/>
+        </a:xfrm>
+      </p:grpSpPr>
+      <p:sp>
+        <p:nvSpPr>
+          <p:cNvPr id="2" name="Title 1">
+            <a:extLst>
+              <a:ext uri="{FF2B5EF4-FFF2-40B4-BE49-F238E27FC236}">
+                <a16:creationId xmlns:a16="http://schemas.microsoft.com/office/drawing/2014/main" id="{5D35E12C-916E-418E-B659-1B83D199A8E3}"/>
+              </a:ext>
+            </a:extLst>
+          </p:cNvPr>
+          <p:cNvSpPr>
+            <a:spLocks noGrp="1"/>
+          </p:cNvSpPr>
+          <p:nvPr>
+            <p:ph type="title"/>
+          </p:nvPr>
+        </p:nvSpPr>
+        <p:spPr>
+          <a:xfrm>
+            <a:off x="1289050" y="708021"/>
+            <a:ext cx="10553343" cy="1081405"/>
+          </a:xfrm>
+        </p:spPr>
+        <p:txBody>
+          <a:bodyPr/>
+          <a:lstStyle/>
+          <a:p>
+            <a:r>
+              <a:rPr lang="en-US" dirty="0"/>
+              <a:t>Beer cache hierarchy</a:t>
+            </a:r>
+            <a:endParaRPr lang="ru-RU" dirty="0"/>
+          </a:p>
+        </p:txBody>
+      </p:sp>
+      <p:pic>
+        <p:nvPicPr>
+          <p:cNvPr id="4" name="Picture 3">
+            <a:extLst>
+              <a:ext uri="{FF2B5EF4-FFF2-40B4-BE49-F238E27FC236}">
+                <a16:creationId xmlns:a16="http://schemas.microsoft.com/office/drawing/2014/main" id="{5FBAC3C5-A32D-424E-80A5-FC81A5C99CEE}"/>
+              </a:ext>
+            </a:extLst>
+          </p:cNvPr>
+          <p:cNvPicPr>
+            <a:picLocks noChangeAspect="1"/>
+          </p:cNvPicPr>
+          <p:nvPr/>
+        </p:nvPicPr>
+        <p:blipFill>
+          <a:blip r:embed="rId2"/>
+          <a:stretch>
+            <a:fillRect/>
+          </a:stretch>
+        </p:blipFill>
+        <p:spPr>
+          <a:xfrm>
+            <a:off x="3565753" y="3444875"/>
+            <a:ext cx="12972593" cy="6058267"/>
+          </a:xfrm>
+          <a:prstGeom prst="rect">
+            <a:avLst/>
+          </a:prstGeom>
+        </p:spPr>
+      </p:pic>
+    </p:spTree>
+    <p:extLst>
+      <p:ext uri="{BB962C8B-B14F-4D97-AF65-F5344CB8AC3E}">
+        <p14:creationId xmlns:p14="http://schemas.microsoft.com/office/powerpoint/2010/main" val="2419069738"/>
+      </p:ext>
+    </p:extLst>
+  </p:cSld>
+  <p:clrMapOvr>
+    <a:masterClrMapping/>
+  </p:clrMapOvr>
+</p:sld>
+</file>
+
+<file path=ppt/slides/slide22.xml><?xml version="1.0" encoding="utf-8"?>
 <p:sld xmlns:a="http://schemas.openxmlformats.org/drawingml/2006/main" xmlns:r="http://schemas.openxmlformats.org/officeDocument/2006/relationships" xmlns:p="http://schemas.openxmlformats.org/presentationml/2006/main" showMasterSp="0">
   <p:cSld>
     <p:spTree>
@@ -9889,7 +10089,7 @@
 </p:sld>
 </file>
 
-<file path=ppt/slides/slide22.xml><?xml version="1.0" encoding="utf-8"?>
+<file path=ppt/slides/slide23.xml><?xml version="1.0" encoding="utf-8"?>
 <p:sld xmlns:a="http://schemas.openxmlformats.org/drawingml/2006/main" xmlns:r="http://schemas.openxmlformats.org/officeDocument/2006/relationships" xmlns:p="http://schemas.openxmlformats.org/presentationml/2006/main">
   <p:cSld>
     <p:spTree>
@@ -9982,7 +10182,7 @@
 </p:sld>
 </file>
 
-<file path=ppt/slides/slide23.xml><?xml version="1.0" encoding="utf-8"?>
+<file path=ppt/slides/slide24.xml><?xml version="1.0" encoding="utf-8"?>
 <p:sld xmlns:a="http://schemas.openxmlformats.org/drawingml/2006/main" xmlns:r="http://schemas.openxmlformats.org/officeDocument/2006/relationships" xmlns:p="http://schemas.openxmlformats.org/presentationml/2006/main">
   <p:cSld>
     <p:spTree>
@@ -10075,7 +10275,7 @@
 </p:sld>
 </file>
 
-<file path=ppt/slides/slide24.xml><?xml version="1.0" encoding="utf-8"?>
+<file path=ppt/slides/slide25.xml><?xml version="1.0" encoding="utf-8"?>
 <p:sld xmlns:a="http://schemas.openxmlformats.org/drawingml/2006/main" xmlns:r="http://schemas.openxmlformats.org/officeDocument/2006/relationships" xmlns:p="http://schemas.openxmlformats.org/presentationml/2006/main" showMasterSp="0">
   <p:cSld>
     <p:spTree>
@@ -10534,7 +10734,7 @@
 </p:sld>
 </file>
 
-<file path=ppt/slides/slide25.xml><?xml version="1.0" encoding="utf-8"?>
+<file path=ppt/slides/slide26.xml><?xml version="1.0" encoding="utf-8"?>
 <p:sld xmlns:a="http://schemas.openxmlformats.org/drawingml/2006/main" xmlns:r="http://schemas.openxmlformats.org/officeDocument/2006/relationships" xmlns:p="http://schemas.openxmlformats.org/presentationml/2006/main" showMasterSp="0">
   <p:cSld>
     <p:spTree>
@@ -11655,7 +11855,7 @@
 </p:sld>
 </file>
 
-<file path=ppt/slides/slide26.xml><?xml version="1.0" encoding="utf-8"?>
+<file path=ppt/slides/slide27.xml><?xml version="1.0" encoding="utf-8"?>
 <p:sld xmlns:a="http://schemas.openxmlformats.org/drawingml/2006/main" xmlns:r="http://schemas.openxmlformats.org/officeDocument/2006/relationships" xmlns:p="http://schemas.openxmlformats.org/presentationml/2006/main" showMasterSp="0">
   <p:cSld>
     <p:spTree>
@@ -11766,7 +11966,7 @@
 </p:sld>
 </file>
 
-<file path=ppt/slides/slide27.xml><?xml version="1.0" encoding="utf-8"?>
+<file path=ppt/slides/slide28.xml><?xml version="1.0" encoding="utf-8"?>
 <p:sld xmlns:a="http://schemas.openxmlformats.org/drawingml/2006/main" xmlns:r="http://schemas.openxmlformats.org/officeDocument/2006/relationships" xmlns:p="http://schemas.openxmlformats.org/presentationml/2006/main" showMasterSp="0">
   <p:cSld>
     <p:spTree>
@@ -12609,7 +12809,7 @@
 </p:sld>
 </file>
 
-<file path=ppt/slides/slide28.xml><?xml version="1.0" encoding="utf-8"?>
+<file path=ppt/slides/slide29.xml><?xml version="1.0" encoding="utf-8"?>
 <p:sld xmlns:a="http://schemas.openxmlformats.org/drawingml/2006/main" xmlns:r="http://schemas.openxmlformats.org/officeDocument/2006/relationships" xmlns:p="http://schemas.openxmlformats.org/presentationml/2006/main" showMasterSp="0">
   <p:cSld>
     <p:spTree>
@@ -13355,11 +13555,18 @@
               </a:spcBef>
             </a:pPr>
             <a:r>
+              <a:rPr lang="en-US" sz="3950" spc="-50" dirty="0">
+                <a:latin typeface="Microsoft Sans Serif"/>
+                <a:cs typeface="Microsoft Sans Serif"/>
+              </a:rPr>
+              <a:t>e.g</a:t>
+            </a:r>
+            <a:r>
               <a:rPr sz="3950" spc="-50" dirty="0">
                 <a:latin typeface="Microsoft Sans Serif"/>
                 <a:cs typeface="Microsoft Sans Serif"/>
               </a:rPr>
-              <a:t>z.B.</a:t>
+              <a:t>.</a:t>
             </a:r>
             <a:r>
               <a:rPr sz="3950" spc="-25" dirty="0">
@@ -16167,7 +16374,7 @@
               <a:t> </a:t>
             </a:r>
             <a:r>
-              <a:rPr sz="3950" spc="-245" dirty="0">
+              <a:rPr sz="3950" spc="-245" dirty="0" err="1">
                 <a:latin typeface="Lucida Sans Unicode"/>
                 <a:cs typeface="Lucida Sans Unicode"/>
               </a:rPr>
@@ -16186,6 +16393,13 @@
                 <a:cs typeface="Microsoft Sans Serif"/>
               </a:rPr>
               <a:t>2^64</a:t>
+            </a:r>
+            <a:r>
+              <a:rPr lang="en-US" sz="3950" spc="150" dirty="0">
+                <a:latin typeface="Microsoft Sans Serif"/>
+                <a:cs typeface="Microsoft Sans Serif"/>
+              </a:rPr>
+              <a:t> - 1</a:t>
             </a:r>
             <a:r>
               <a:rPr sz="3950" dirty="0">
